--- a/catalog/samples/section_divider.pptx
+++ b/catalog/samples/section_divider.pptx
@@ -672,7 +672,7 @@
           </a:p>
           <a:p>
             <a:r>
-              <a:t>  "template_sha256": "0b3f123c8d98d91292d9533bb938c6734fa97586956f1a6cc48415127a5fa612"</a:t>
+              <a:t>  "template_sha256": "7b9c4f9e598a857131aaf2bdcc5270031893842464638b0f647e54364605242a"</a:t>
             </a:r>
           </a:p>
           <a:p>
